--- a/Sahayak_AI_Pitch.pptx
+++ b/Sahayak_AI_Pitch.pptx
@@ -3412,7 +3412,7 @@
         </p:nvSpPr>
         <p:spPr>
           <a:xfrm>
-            <a:off x="0" y="0"/>
+            <a:off x="6531" y="0"/>
             <a:ext cx="4389120" cy="5143500"/>
           </a:xfrm>
           <a:prstGeom prst="rect">
